--- a/AI-Driven Embedded Product Lifecycle OrchestratorV8.pptx
+++ b/AI-Driven Embedded Product Lifecycle OrchestratorV8.pptx
@@ -147,7 +147,7 @@
   <p1510:revLst>
     <p1510:client id="{0D34CE74-0792-4501-A99F-2CF3CFA1166E}" v="107" dt="2026-06-15T13:19:31.730"/>
     <p1510:client id="{14B4AA2C-2FF3-3A7D-B1B7-20FF86D16280}" v="2" dt="2026-06-15T12:34:32.869"/>
-    <p1510:client id="{7F5A5EC7-A3F4-41AD-9141-CF10EA960EAA}" v="1" dt="2026-06-16T05:01:14.907"/>
+    <p1510:client id="{7F5A5EC7-A3F4-41AD-9141-CF10EA960EAA}" v="31" dt="2026-06-16T07:14:16.168"/>
   </p1510:revLst>
 </p1510:revInfo>
 </file>
@@ -743,7 +743,7 @@
           <a:lstStyle/>
           <a:p>
             <a:r>
-              <a:rPr lang="en-US" sz="1200" b="0" i="0" kern="1200">
+              <a:rPr lang="en-US" sz="1200" b="0" i="0" kern="1200" dirty="0">
                 <a:solidFill>
                   <a:schemeClr val="tx1"/>
                 </a:solidFill>
@@ -752,12 +752,12 @@
                 <a:ea typeface="+mn-ea"/>
                 <a:cs typeface="+mn-cs"/>
               </a:rPr>
-              <a:t>Today We are  presenting AEPLO V3 [code name for our project]— an AI platform that</a:t>
+              <a:t>Today we are presenting the AEPLO JTAG Accelerator for</a:t>
             </a:r>
           </a:p>
           <a:p>
             <a:r>
-              <a:rPr lang="en-US" sz="1200" b="0" i="0" kern="1200">
+              <a:rPr lang="en-US" sz="1200" b="0" i="0" kern="1200" dirty="0">
                 <a:solidFill>
                   <a:schemeClr val="tx1"/>
                 </a:solidFill>
@@ -766,11 +766,61 @@
                 <a:ea typeface="+mn-ea"/>
                 <a:cs typeface="+mn-cs"/>
               </a:rPr>
-              <a:t>orchestrates the entire embedded product lifecycle</a:t>
+              <a:t>Embedded PDLC AI </a:t>
             </a:r>
-          </a:p>
-          <a:p>
-            <a:endParaRPr lang="en-US"/>
+            <a:r>
+              <a:rPr lang="en-US" sz="1200" b="0" i="0" kern="1200" dirty="0" err="1">
+                <a:solidFill>
+                  <a:schemeClr val="tx1"/>
+                </a:solidFill>
+                <a:effectLst/>
+                <a:latin typeface="+mn-lt"/>
+                <a:ea typeface="+mn-ea"/>
+                <a:cs typeface="+mn-cs"/>
+              </a:rPr>
+              <a:t>Optimisation</a:t>
+            </a:r>
+            <a:r>
+              <a:rPr lang="en-US" sz="1200" b="0" i="0" kern="1200" dirty="0">
+                <a:solidFill>
+                  <a:schemeClr val="tx1"/>
+                </a:solidFill>
+                <a:effectLst/>
+                <a:latin typeface="+mn-lt"/>
+                <a:ea typeface="+mn-ea"/>
+                <a:cs typeface="+mn-cs"/>
+              </a:rPr>
+              <a:t>. The story is simple: connect</a:t>
+            </a:r>
+          </a:p>
+          <a:p>
+            <a:r>
+              <a:rPr lang="en-US" sz="1200" b="0" i="0" kern="1200" dirty="0">
+                <a:solidFill>
+                  <a:schemeClr val="tx1"/>
+                </a:solidFill>
+                <a:effectLst/>
+                <a:latin typeface="+mn-lt"/>
+                <a:ea typeface="+mn-ea"/>
+                <a:cs typeface="+mn-cs"/>
+              </a:rPr>
+              <a:t>planning data, code, AI assistance, and JTAG evidence so we</a:t>
+            </a:r>
+          </a:p>
+          <a:p>
+            <a:r>
+              <a:rPr lang="en-US" sz="1200" b="0" i="0" kern="1200" dirty="0">
+                <a:solidFill>
+                  <a:schemeClr val="tx1"/>
+                </a:solidFill>
+                <a:effectLst/>
+                <a:latin typeface="+mn-lt"/>
+                <a:ea typeface="+mn-ea"/>
+                <a:cs typeface="+mn-cs"/>
+              </a:rPr>
+              <a:t>can move faster from discovery to validated launch readiness.</a:t>
+            </a:r>
+            <a:endParaRPr lang="en-US" dirty="0"/>
           </a:p>
         </p:txBody>
       </p:sp>
@@ -898,6 +948,675 @@
 </p:notes>
 </file>
 
+<file path=ppt/notesSlides/notesSlide10.xml><?xml version="1.0" encoding="utf-8"?>
+<p:notes xmlns:a="http://schemas.openxmlformats.org/drawingml/2006/main" xmlns:r="http://schemas.openxmlformats.org/officeDocument/2006/relationships" xmlns:p="http://schemas.openxmlformats.org/presentationml/2006/main">
+  <p:cSld>
+    <p:spTree>
+      <p:nvGrpSpPr>
+        <p:cNvPr id="1" name=""/>
+        <p:cNvGrpSpPr/>
+        <p:nvPr/>
+      </p:nvGrpSpPr>
+      <p:grpSpPr>
+        <a:xfrm>
+          <a:off x="0" y="0"/>
+          <a:ext cx="0" cy="0"/>
+          <a:chOff x="0" y="0"/>
+          <a:chExt cx="0" cy="0"/>
+        </a:xfrm>
+      </p:grpSpPr>
+      <p:sp>
+        <p:nvSpPr>
+          <p:cNvPr id="2" name="Slide Image Placeholder 1"/>
+          <p:cNvSpPr>
+            <a:spLocks noGrp="1" noRot="1" noChangeAspect="1"/>
+          </p:cNvSpPr>
+          <p:nvPr>
+            <p:ph type="sldImg"/>
+          </p:nvPr>
+        </p:nvSpPr>
+        <p:spPr/>
+      </p:sp>
+      <p:sp>
+        <p:nvSpPr>
+          <p:cNvPr id="3" name="Notes Placeholder 2"/>
+          <p:cNvSpPr>
+            <a:spLocks noGrp="1"/>
+          </p:cNvSpPr>
+          <p:nvPr>
+            <p:ph type="body" idx="1"/>
+          </p:nvPr>
+        </p:nvSpPr>
+        <p:spPr/>
+        <p:txBody>
+          <a:bodyPr/>
+          <a:lstStyle/>
+          <a:p>
+            <a:r>
+              <a:rPr lang="en-US" dirty="0"/>
+              <a:t>"QA2Release closes the loop. Test failures and JTAG evidence</a:t>
+            </a:r>
+          </a:p>
+          <a:p>
+            <a:r>
+              <a:rPr lang="en-US" dirty="0"/>
+              <a:t>feed root-cause analysis, test </a:t>
+            </a:r>
+            <a:r>
+              <a:rPr lang="en-US" dirty="0" err="1"/>
+              <a:t>optimisation</a:t>
+            </a:r>
+            <a:r>
+              <a:rPr lang="en-US" dirty="0"/>
+              <a:t>, and next-release</a:t>
+            </a:r>
+          </a:p>
+          <a:p>
+            <a:r>
+              <a:rPr lang="en-US" dirty="0"/>
+              <a:t>learning. The output becomes Jira actions, Confluence summaries,</a:t>
+            </a:r>
+          </a:p>
+          <a:p>
+            <a:r>
+              <a:rPr lang="en-US" dirty="0"/>
+              <a:t>and better evidence for the next gate.</a:t>
+            </a:r>
+          </a:p>
+        </p:txBody>
+      </p:sp>
+      <p:sp>
+        <p:nvSpPr>
+          <p:cNvPr id="4" name="Footer Placeholder 3"/>
+          <p:cNvSpPr>
+            <a:spLocks noGrp="1"/>
+          </p:cNvSpPr>
+          <p:nvPr>
+            <p:ph type="ftr" sz="quarter" idx="4"/>
+          </p:nvPr>
+        </p:nvSpPr>
+        <p:spPr/>
+        <p:txBody>
+          <a:bodyPr/>
+          <a:lstStyle/>
+          <a:p>
+            <a:r>
+              <a:rPr lang="en-US"/>
+              <a:t>Honeywell</a:t>
+            </a:r>
+          </a:p>
+        </p:txBody>
+      </p:sp>
+      <p:sp>
+        <p:nvSpPr>
+          <p:cNvPr id="5" name="Slide Number Placeholder 4"/>
+          <p:cNvSpPr>
+            <a:spLocks noGrp="1"/>
+          </p:cNvSpPr>
+          <p:nvPr>
+            <p:ph type="sldNum" sz="quarter" idx="5"/>
+          </p:nvPr>
+        </p:nvSpPr>
+        <p:spPr/>
+        <p:txBody>
+          <a:bodyPr/>
+          <a:lstStyle/>
+          <a:p>
+            <a:fld id="{BB99C4E8-DCB7-4C66-B47F-361D1DFDA228}" type="slidenum">
+              <a:rPr lang="en-US" smtClean="0"/>
+              <a:t>10</a:t>
+            </a:fld>
+            <a:endParaRPr lang="en-US"/>
+          </a:p>
+        </p:txBody>
+      </p:sp>
+    </p:spTree>
+    <p:extLst>
+      <p:ext uri="{BB962C8B-B14F-4D97-AF65-F5344CB8AC3E}">
+        <p14:creationId xmlns:p14="http://schemas.microsoft.com/office/powerpoint/2010/main" val="3416125499"/>
+      </p:ext>
+    </p:extLst>
+  </p:cSld>
+  <p:clrMapOvr>
+    <a:masterClrMapping/>
+  </p:clrMapOvr>
+</p:notes>
+</file>
+
+<file path=ppt/notesSlides/notesSlide11.xml><?xml version="1.0" encoding="utf-8"?>
+<p:notes xmlns:a="http://schemas.openxmlformats.org/drawingml/2006/main" xmlns:r="http://schemas.openxmlformats.org/officeDocument/2006/relationships" xmlns:p="http://schemas.openxmlformats.org/presentationml/2006/main">
+  <p:cSld>
+    <p:spTree>
+      <p:nvGrpSpPr>
+        <p:cNvPr id="1" name=""/>
+        <p:cNvGrpSpPr/>
+        <p:nvPr/>
+      </p:nvGrpSpPr>
+      <p:grpSpPr>
+        <a:xfrm>
+          <a:off x="0" y="0"/>
+          <a:ext cx="0" cy="0"/>
+          <a:chOff x="0" y="0"/>
+          <a:chExt cx="0" cy="0"/>
+        </a:xfrm>
+      </p:grpSpPr>
+      <p:sp>
+        <p:nvSpPr>
+          <p:cNvPr id="2" name="Slide Image Placeholder 1"/>
+          <p:cNvSpPr>
+            <a:spLocks noGrp="1" noRot="1" noChangeAspect="1"/>
+          </p:cNvSpPr>
+          <p:nvPr>
+            <p:ph type="sldImg"/>
+          </p:nvPr>
+        </p:nvSpPr>
+        <p:spPr/>
+      </p:sp>
+      <p:sp>
+        <p:nvSpPr>
+          <p:cNvPr id="3" name="Notes Placeholder 2"/>
+          <p:cNvSpPr>
+            <a:spLocks noGrp="1"/>
+          </p:cNvSpPr>
+          <p:nvPr>
+            <p:ph type="body" idx="1"/>
+          </p:nvPr>
+        </p:nvSpPr>
+        <p:spPr/>
+        <p:txBody>
+          <a:bodyPr/>
+          <a:lstStyle/>
+          <a:p>
+            <a:r>
+              <a:rPr lang="en-US" dirty="0"/>
+              <a:t>The live demo follows three stages: PG1 discovery in ROVO</a:t>
+            </a:r>
+          </a:p>
+          <a:p>
+            <a:r>
+              <a:rPr lang="en-US" dirty="0"/>
+              <a:t>Studio, PG3 development with the JTAG Accelerator and Copilot,</a:t>
+            </a:r>
+          </a:p>
+          <a:p>
+            <a:r>
+              <a:rPr lang="en-US" dirty="0"/>
+              <a:t>and PG5 validation with AEPLO release gating , STQC Agent and automated</a:t>
+            </a:r>
+          </a:p>
+          <a:p>
+            <a:r>
+              <a:rPr lang="en-US" dirty="0"/>
+              <a:t>launch-prep evidence.</a:t>
+            </a:r>
+          </a:p>
+        </p:txBody>
+      </p:sp>
+      <p:sp>
+        <p:nvSpPr>
+          <p:cNvPr id="4" name="Footer Placeholder 3"/>
+          <p:cNvSpPr>
+            <a:spLocks noGrp="1"/>
+          </p:cNvSpPr>
+          <p:nvPr>
+            <p:ph type="ftr" sz="quarter" idx="4"/>
+          </p:nvPr>
+        </p:nvSpPr>
+        <p:spPr/>
+        <p:txBody>
+          <a:bodyPr/>
+          <a:lstStyle/>
+          <a:p>
+            <a:r>
+              <a:rPr lang="en-US"/>
+              <a:t>Honeywell</a:t>
+            </a:r>
+          </a:p>
+        </p:txBody>
+      </p:sp>
+      <p:sp>
+        <p:nvSpPr>
+          <p:cNvPr id="5" name="Slide Number Placeholder 4"/>
+          <p:cNvSpPr>
+            <a:spLocks noGrp="1"/>
+          </p:cNvSpPr>
+          <p:nvPr>
+            <p:ph type="sldNum" sz="quarter" idx="5"/>
+          </p:nvPr>
+        </p:nvSpPr>
+        <p:spPr/>
+        <p:txBody>
+          <a:bodyPr/>
+          <a:lstStyle/>
+          <a:p>
+            <a:fld id="{BB99C4E8-DCB7-4C66-B47F-361D1DFDA228}" type="slidenum">
+              <a:rPr lang="en-US" smtClean="0"/>
+              <a:t>11</a:t>
+            </a:fld>
+            <a:endParaRPr lang="en-US"/>
+          </a:p>
+        </p:txBody>
+      </p:sp>
+    </p:spTree>
+    <p:extLst>
+      <p:ext uri="{BB962C8B-B14F-4D97-AF65-F5344CB8AC3E}">
+        <p14:creationId xmlns:p14="http://schemas.microsoft.com/office/powerpoint/2010/main" val="978364571"/>
+      </p:ext>
+    </p:extLst>
+  </p:cSld>
+  <p:clrMapOvr>
+    <a:masterClrMapping/>
+  </p:clrMapOvr>
+</p:notes>
+</file>
+
+<file path=ppt/notesSlides/notesSlide12.xml><?xml version="1.0" encoding="utf-8"?>
+<p:notes xmlns:a="http://schemas.openxmlformats.org/drawingml/2006/main" xmlns:r="http://schemas.openxmlformats.org/officeDocument/2006/relationships" xmlns:p="http://schemas.openxmlformats.org/presentationml/2006/main">
+  <p:cSld>
+    <p:spTree>
+      <p:nvGrpSpPr>
+        <p:cNvPr id="1" name=""/>
+        <p:cNvGrpSpPr/>
+        <p:nvPr/>
+      </p:nvGrpSpPr>
+      <p:grpSpPr>
+        <a:xfrm>
+          <a:off x="0" y="0"/>
+          <a:ext cx="0" cy="0"/>
+          <a:chOff x="0" y="0"/>
+          <a:chExt cx="0" cy="0"/>
+        </a:xfrm>
+      </p:grpSpPr>
+      <p:sp>
+        <p:nvSpPr>
+          <p:cNvPr id="2" name="Slide Image Placeholder 1"/>
+          <p:cNvSpPr>
+            <a:spLocks noGrp="1" noRot="1" noChangeAspect="1"/>
+          </p:cNvSpPr>
+          <p:nvPr>
+            <p:ph type="sldImg"/>
+          </p:nvPr>
+        </p:nvSpPr>
+        <p:spPr/>
+      </p:sp>
+      <p:sp>
+        <p:nvSpPr>
+          <p:cNvPr id="3" name="Notes Placeholder 2"/>
+          <p:cNvSpPr>
+            <a:spLocks noGrp="1"/>
+          </p:cNvSpPr>
+          <p:nvPr>
+            <p:ph type="body" idx="1"/>
+          </p:nvPr>
+        </p:nvSpPr>
+        <p:spPr/>
+        <p:txBody>
+          <a:bodyPr/>
+          <a:lstStyle/>
+          <a:p>
+            <a:r>
+              <a:rPr lang="en-US" dirty="0"/>
+              <a:t>"The value for embedded teams is practical: reduced defect</a:t>
+            </a:r>
+          </a:p>
+          <a:p>
+            <a:r>
+              <a:rPr lang="en-US" dirty="0"/>
+              <a:t>leakage, faster firmware root cause, clearer NPI gate</a:t>
+            </a:r>
+          </a:p>
+          <a:p>
+            <a:r>
+              <a:rPr lang="en-US" dirty="0"/>
+              <a:t>confidence, and AI-</a:t>
+            </a:r>
+            <a:r>
+              <a:rPr lang="en-US" dirty="0" err="1"/>
+              <a:t>optimised</a:t>
+            </a:r>
+            <a:r>
+              <a:rPr lang="en-US" dirty="0"/>
+              <a:t> PDLC work across planning, coding,</a:t>
+            </a:r>
+          </a:p>
+          <a:p>
+            <a:r>
+              <a:rPr lang="en-US" dirty="0"/>
+              <a:t>validation, and launch preparation."</a:t>
+            </a:r>
+          </a:p>
+        </p:txBody>
+      </p:sp>
+      <p:sp>
+        <p:nvSpPr>
+          <p:cNvPr id="4" name="Slide Number Placeholder 3"/>
+          <p:cNvSpPr>
+            <a:spLocks noGrp="1"/>
+          </p:cNvSpPr>
+          <p:nvPr>
+            <p:ph type="sldNum" sz="quarter" idx="5"/>
+          </p:nvPr>
+        </p:nvSpPr>
+        <p:spPr/>
+        <p:txBody>
+          <a:bodyPr/>
+          <a:lstStyle/>
+          <a:p>
+            <a:fld id="{BB99C4E8-DCB7-4C66-B47F-361D1DFDA228}" type="slidenum">
+              <a:rPr lang="en-US" smtClean="0"/>
+              <a:t>12</a:t>
+            </a:fld>
+            <a:endParaRPr lang="en-US"/>
+          </a:p>
+        </p:txBody>
+      </p:sp>
+      <p:sp>
+        <p:nvSpPr>
+          <p:cNvPr id="5" name="Footer Placeholder 4">
+            <a:extLst>
+              <a:ext uri="{FF2B5EF4-FFF2-40B4-BE49-F238E27FC236}">
+                <a16:creationId xmlns:a16="http://schemas.microsoft.com/office/drawing/2014/main" id="{83EC47DC-78E4-96AC-C239-EF94F65A5678}"/>
+              </a:ext>
+            </a:extLst>
+          </p:cNvPr>
+          <p:cNvSpPr>
+            <a:spLocks noGrp="1"/>
+          </p:cNvSpPr>
+          <p:nvPr>
+            <p:ph type="ftr" sz="quarter" idx="4"/>
+          </p:nvPr>
+        </p:nvSpPr>
+        <p:spPr/>
+        <p:txBody>
+          <a:bodyPr/>
+          <a:lstStyle/>
+          <a:p>
+            <a:r>
+              <a:rPr lang="en-US"/>
+              <a:t>Honeywell</a:t>
+            </a:r>
+          </a:p>
+        </p:txBody>
+      </p:sp>
+    </p:spTree>
+    <p:extLst>
+      <p:ext uri="{BB962C8B-B14F-4D97-AF65-F5344CB8AC3E}">
+        <p14:creationId xmlns:p14="http://schemas.microsoft.com/office/powerpoint/2010/main" val="2365324717"/>
+      </p:ext>
+    </p:extLst>
+  </p:cSld>
+  <p:clrMapOvr>
+    <a:masterClrMapping/>
+  </p:clrMapOvr>
+</p:notes>
+</file>
+
+<file path=ppt/notesSlides/notesSlide13.xml><?xml version="1.0" encoding="utf-8"?>
+<p:notes xmlns:a="http://schemas.openxmlformats.org/drawingml/2006/main" xmlns:r="http://schemas.openxmlformats.org/officeDocument/2006/relationships" xmlns:p="http://schemas.openxmlformats.org/presentationml/2006/main">
+  <p:cSld>
+    <p:spTree>
+      <p:nvGrpSpPr>
+        <p:cNvPr id="1" name=""/>
+        <p:cNvGrpSpPr/>
+        <p:nvPr/>
+      </p:nvGrpSpPr>
+      <p:grpSpPr>
+        <a:xfrm>
+          <a:off x="0" y="0"/>
+          <a:ext cx="0" cy="0"/>
+          <a:chOff x="0" y="0"/>
+          <a:chExt cx="0" cy="0"/>
+        </a:xfrm>
+      </p:grpSpPr>
+      <p:sp>
+        <p:nvSpPr>
+          <p:cNvPr id="2" name="Slide Image Placeholder 1"/>
+          <p:cNvSpPr>
+            <a:spLocks noGrp="1" noRot="1" noChangeAspect="1"/>
+          </p:cNvSpPr>
+          <p:nvPr>
+            <p:ph type="sldImg"/>
+          </p:nvPr>
+        </p:nvSpPr>
+        <p:spPr/>
+      </p:sp>
+      <p:sp>
+        <p:nvSpPr>
+          <p:cNvPr id="3" name="Notes Placeholder 2"/>
+          <p:cNvSpPr>
+            <a:spLocks noGrp="1"/>
+          </p:cNvSpPr>
+          <p:nvPr>
+            <p:ph type="body" idx="1"/>
+          </p:nvPr>
+        </p:nvSpPr>
+        <p:spPr/>
+        <p:txBody>
+          <a:bodyPr/>
+          <a:lstStyle/>
+          <a:p>
+            <a:r>
+              <a:rPr lang="en-US" dirty="0"/>
+              <a:t>"The matrix connects the demo to measurable judging criteria.</a:t>
+            </a:r>
+          </a:p>
+          <a:p>
+            <a:r>
+              <a:rPr lang="en-US" dirty="0"/>
+              <a:t>We show a 41 percent lead-time drop, 60 percent fewer projected</a:t>
+            </a:r>
+          </a:p>
+          <a:p>
+            <a:r>
+              <a:rPr lang="en-US" dirty="0"/>
+              <a:t>defect escapes, 85 percent BA hosting readiness, and measurable</a:t>
+            </a:r>
+          </a:p>
+          <a:p>
+            <a:r>
+              <a:rPr lang="en-US" dirty="0"/>
+              <a:t>agentic AI execution metrics including handoff success, tool</a:t>
+            </a:r>
+          </a:p>
+          <a:p>
+            <a:r>
+              <a:rPr lang="en-US" dirty="0"/>
+              <a:t>calling accuracy, and prompt caching </a:t>
+            </a:r>
+            <a:r>
+              <a:rPr lang="en-US" dirty="0" err="1"/>
+              <a:t>utilisation</a:t>
+            </a:r>
+            <a:r>
+              <a:rPr lang="en-US" dirty="0"/>
+              <a:t>."</a:t>
+            </a:r>
+          </a:p>
+        </p:txBody>
+      </p:sp>
+      <p:sp>
+        <p:nvSpPr>
+          <p:cNvPr id="4" name="Footer Placeholder 3"/>
+          <p:cNvSpPr>
+            <a:spLocks noGrp="1"/>
+          </p:cNvSpPr>
+          <p:nvPr>
+            <p:ph type="ftr" sz="quarter" idx="4"/>
+          </p:nvPr>
+        </p:nvSpPr>
+        <p:spPr/>
+        <p:txBody>
+          <a:bodyPr/>
+          <a:lstStyle/>
+          <a:p>
+            <a:r>
+              <a:rPr lang="en-US"/>
+              <a:t>Honeywell</a:t>
+            </a:r>
+          </a:p>
+        </p:txBody>
+      </p:sp>
+      <p:sp>
+        <p:nvSpPr>
+          <p:cNvPr id="5" name="Slide Number Placeholder 4"/>
+          <p:cNvSpPr>
+            <a:spLocks noGrp="1"/>
+          </p:cNvSpPr>
+          <p:nvPr>
+            <p:ph type="sldNum" sz="quarter" idx="5"/>
+          </p:nvPr>
+        </p:nvSpPr>
+        <p:spPr/>
+        <p:txBody>
+          <a:bodyPr/>
+          <a:lstStyle/>
+          <a:p>
+            <a:fld id="{BB99C4E8-DCB7-4C66-B47F-361D1DFDA228}" type="slidenum">
+              <a:rPr lang="en-US" smtClean="0"/>
+              <a:t>13</a:t>
+            </a:fld>
+            <a:endParaRPr lang="en-US"/>
+          </a:p>
+        </p:txBody>
+      </p:sp>
+    </p:spTree>
+    <p:extLst>
+      <p:ext uri="{BB962C8B-B14F-4D97-AF65-F5344CB8AC3E}">
+        <p14:creationId xmlns:p14="http://schemas.microsoft.com/office/powerpoint/2010/main" val="2418823309"/>
+      </p:ext>
+    </p:extLst>
+  </p:cSld>
+  <p:clrMapOvr>
+    <a:masterClrMapping/>
+  </p:clrMapOvr>
+</p:notes>
+</file>
+
+<file path=ppt/notesSlides/notesSlide14.xml><?xml version="1.0" encoding="utf-8"?>
+<p:notes xmlns:a="http://schemas.openxmlformats.org/drawingml/2006/main" xmlns:r="http://schemas.openxmlformats.org/officeDocument/2006/relationships" xmlns:p="http://schemas.openxmlformats.org/presentationml/2006/main">
+  <p:cSld>
+    <p:spTree>
+      <p:nvGrpSpPr>
+        <p:cNvPr id="1" name=""/>
+        <p:cNvGrpSpPr/>
+        <p:nvPr/>
+      </p:nvGrpSpPr>
+      <p:grpSpPr>
+        <a:xfrm>
+          <a:off x="0" y="0"/>
+          <a:ext cx="0" cy="0"/>
+          <a:chOff x="0" y="0"/>
+          <a:chExt cx="0" cy="0"/>
+        </a:xfrm>
+      </p:grpSpPr>
+      <p:sp>
+        <p:nvSpPr>
+          <p:cNvPr id="2" name="Slide Image Placeholder 1"/>
+          <p:cNvSpPr>
+            <a:spLocks noGrp="1" noRot="1" noChangeAspect="1"/>
+          </p:cNvSpPr>
+          <p:nvPr>
+            <p:ph type="sldImg"/>
+          </p:nvPr>
+        </p:nvSpPr>
+        <p:spPr/>
+      </p:sp>
+      <p:sp>
+        <p:nvSpPr>
+          <p:cNvPr id="3" name="Notes Placeholder 2"/>
+          <p:cNvSpPr>
+            <a:spLocks noGrp="1"/>
+          </p:cNvSpPr>
+          <p:nvPr>
+            <p:ph type="body" idx="1"/>
+          </p:nvPr>
+        </p:nvSpPr>
+        <p:spPr/>
+        <p:txBody>
+          <a:bodyPr/>
+          <a:lstStyle/>
+          <a:p>
+            <a:r>
+              <a:rPr lang="en-US" dirty="0"/>
+              <a:t>"The common idea is connected embedded data plus intelligent</a:t>
+            </a:r>
+          </a:p>
+          <a:p>
+            <a:r>
+              <a:rPr lang="en-US" dirty="0"/>
+              <a:t>PDLC action. AEPLO, with the JTAG Accelerator inside it, helps</a:t>
+            </a:r>
+          </a:p>
+          <a:p>
+            <a:r>
+              <a:rPr lang="en-US" dirty="0" err="1"/>
+              <a:t>optimise</a:t>
+            </a:r>
+            <a:r>
+              <a:rPr lang="en-US" dirty="0"/>
+              <a:t> every gate from PG1 to PG5. Thank you."</a:t>
+            </a:r>
+          </a:p>
+        </p:txBody>
+      </p:sp>
+      <p:sp>
+        <p:nvSpPr>
+          <p:cNvPr id="4" name="Footer Placeholder 3"/>
+          <p:cNvSpPr>
+            <a:spLocks noGrp="1"/>
+          </p:cNvSpPr>
+          <p:nvPr>
+            <p:ph type="ftr" sz="quarter" idx="4"/>
+          </p:nvPr>
+        </p:nvSpPr>
+        <p:spPr/>
+        <p:txBody>
+          <a:bodyPr/>
+          <a:lstStyle/>
+          <a:p>
+            <a:r>
+              <a:rPr lang="en-US"/>
+              <a:t>Honeywell</a:t>
+            </a:r>
+          </a:p>
+        </p:txBody>
+      </p:sp>
+      <p:sp>
+        <p:nvSpPr>
+          <p:cNvPr id="5" name="Slide Number Placeholder 4"/>
+          <p:cNvSpPr>
+            <a:spLocks noGrp="1"/>
+          </p:cNvSpPr>
+          <p:nvPr>
+            <p:ph type="sldNum" sz="quarter" idx="5"/>
+          </p:nvPr>
+        </p:nvSpPr>
+        <p:spPr/>
+        <p:txBody>
+          <a:bodyPr/>
+          <a:lstStyle/>
+          <a:p>
+            <a:fld id="{BB99C4E8-DCB7-4C66-B47F-361D1DFDA228}" type="slidenum">
+              <a:rPr lang="en-US" smtClean="0"/>
+              <a:t>14</a:t>
+            </a:fld>
+            <a:endParaRPr lang="en-US"/>
+          </a:p>
+        </p:txBody>
+      </p:sp>
+    </p:spTree>
+    <p:extLst>
+      <p:ext uri="{BB962C8B-B14F-4D97-AF65-F5344CB8AC3E}">
+        <p14:creationId xmlns:p14="http://schemas.microsoft.com/office/powerpoint/2010/main" val="850256656"/>
+      </p:ext>
+    </p:extLst>
+  </p:cSld>
+  <p:clrMapOvr>
+    <a:masterClrMapping/>
+  </p:clrMapOvr>
+</p:notes>
+</file>
+
 <file path=ppt/notesSlides/notesSlide2.xml><?xml version="1.0" encoding="utf-8"?>
 <p:notes xmlns:a="http://schemas.openxmlformats.org/drawingml/2006/main" xmlns:r="http://schemas.openxmlformats.org/officeDocument/2006/relationships" xmlns:p="http://schemas.openxmlformats.org/presentationml/2006/main">
   <p:cSld>
@@ -942,13 +1661,63 @@
           <a:bodyPr/>
           <a:lstStyle/>
           <a:p>
-            <a:endParaRPr lang="en-US"/>
-          </a:p>
-        </p:txBody>
-      </p:sp>
-      <p:sp>
-        <p:nvSpPr>
-          <p:cNvPr id="4" name="Slide Number Placeholder 3"/>
+            <a:r>
+              <a:rPr lang="en-US" dirty="0"/>
+              <a:t>Problem :</a:t>
+            </a:r>
+            <a:br>
+              <a:rPr lang="en-US" dirty="0"/>
+            </a:br>
+            <a:r>
+              <a:rPr lang="en-US" dirty="0"/>
+              <a:t>Embedded PDLC data is fragmented. Jira, Confluence, GitHub,</a:t>
+            </a:r>
+          </a:p>
+          <a:p>
+            <a:r>
+              <a:rPr lang="en-US" dirty="0"/>
+              <a:t>QA results, and JTAG/SWD hardware evidence often sit in</a:t>
+            </a:r>
+          </a:p>
+          <a:p>
+            <a:r>
+              <a:rPr lang="en-US" dirty="0"/>
+              <a:t>separate places. That slows decisions across PG1, PG3, and PG5</a:t>
+            </a:r>
+          </a:p>
+          <a:p>
+            <a:r>
+              <a:rPr lang="en-US" dirty="0"/>
+              <a:t>and makes launch readiness harder to prove.</a:t>
+            </a:r>
+          </a:p>
+        </p:txBody>
+      </p:sp>
+      <p:sp>
+        <p:nvSpPr>
+          <p:cNvPr id="4" name="Footer Placeholder 3"/>
+          <p:cNvSpPr>
+            <a:spLocks noGrp="1"/>
+          </p:cNvSpPr>
+          <p:nvPr>
+            <p:ph type="ftr" sz="quarter" idx="4"/>
+          </p:nvPr>
+        </p:nvSpPr>
+        <p:spPr/>
+        <p:txBody>
+          <a:bodyPr/>
+          <a:lstStyle/>
+          <a:p>
+            <a:r>
+              <a:rPr lang="en-US"/>
+              <a:t>Honeywell</a:t>
+            </a:r>
+          </a:p>
+        </p:txBody>
+      </p:sp>
+      <p:sp>
+        <p:nvSpPr>
+          <p:cNvPr id="5" name="Slide Number Placeholder 4"/>
           <p:cNvSpPr>
             <a:spLocks noGrp="1"/>
           </p:cNvSpPr>
@@ -961,46 +1730,18 @@
           <a:bodyPr/>
           <a:lstStyle/>
           <a:p>
-            <a:fld id="{4FA84156-8AE9-4423-952A-88BA8F9A5A49}" type="slidenum">
+            <a:fld id="{BB99C4E8-DCB7-4C66-B47F-361D1DFDA228}" type="slidenum">
               <a:rPr lang="en-US" smtClean="0"/>
-              <a:t>8</a:t>
+              <a:t>2</a:t>
             </a:fld>
             <a:endParaRPr lang="en-US"/>
-          </a:p>
-        </p:txBody>
-      </p:sp>
-      <p:sp>
-        <p:nvSpPr>
-          <p:cNvPr id="5" name="Footer Placeholder 4">
-            <a:extLst>
-              <a:ext uri="{FF2B5EF4-FFF2-40B4-BE49-F238E27FC236}">
-                <a16:creationId xmlns:a16="http://schemas.microsoft.com/office/drawing/2014/main" id="{9694013F-CC9D-DB38-4883-8B125F1E99B3}"/>
-              </a:ext>
-            </a:extLst>
-          </p:cNvPr>
-          <p:cNvSpPr>
-            <a:spLocks noGrp="1"/>
-          </p:cNvSpPr>
-          <p:nvPr>
-            <p:ph type="ftr" sz="quarter" idx="4"/>
-          </p:nvPr>
-        </p:nvSpPr>
-        <p:spPr/>
-        <p:txBody>
-          <a:bodyPr/>
-          <a:lstStyle/>
-          <a:p>
-            <a:r>
-              <a:rPr lang="en-US"/>
-              <a:t>Honeywell</a:t>
-            </a:r>
           </a:p>
         </p:txBody>
       </p:sp>
     </p:spTree>
     <p:extLst>
       <p:ext uri="{BB962C8B-B14F-4D97-AF65-F5344CB8AC3E}">
-        <p14:creationId xmlns:p14="http://schemas.microsoft.com/office/powerpoint/2010/main" val="1259615538"/>
+        <p14:creationId xmlns:p14="http://schemas.microsoft.com/office/powerpoint/2010/main" val="3805286964"/>
       </p:ext>
     </p:extLst>
   </p:cSld>
@@ -1054,7 +1795,787 @@
           <a:bodyPr/>
           <a:lstStyle/>
           <a:p>
+            <a:r>
+              <a:rPr lang="en-US" dirty="0"/>
+              <a:t>Solution :</a:t>
+            </a:r>
+            <a:br>
+              <a:rPr lang="en-US" dirty="0"/>
+            </a:br>
+            <a:r>
+              <a:rPr lang="en-US" dirty="0"/>
+              <a:t>AEPLO becomes the connected platform. It treats JTAG evidence</a:t>
+            </a:r>
+          </a:p>
+          <a:p>
+            <a:r>
+              <a:rPr lang="en-US" dirty="0"/>
+              <a:t>as a native PDLC signal, combines it with traceability and</a:t>
+            </a:r>
+          </a:p>
+          <a:p>
+            <a:r>
+              <a:rPr lang="en-US" dirty="0"/>
+              <a:t>project context, and applies AI </a:t>
+            </a:r>
+            <a:r>
+              <a:rPr lang="en-US" dirty="0" err="1"/>
+              <a:t>optimisation</a:t>
+            </a:r>
+            <a:r>
+              <a:rPr lang="en-US" dirty="0"/>
+              <a:t> through ROVO</a:t>
+            </a:r>
+          </a:p>
+          <a:p>
+            <a:r>
+              <a:rPr lang="en-US" dirty="0"/>
+              <a:t>Studio, Copilot, and </a:t>
+            </a:r>
+            <a:r>
+              <a:rPr lang="en-US" dirty="0" err="1"/>
+              <a:t>specialised</a:t>
+            </a:r>
+            <a:r>
+              <a:rPr lang="en-US" dirty="0"/>
+              <a:t> agents</a:t>
+            </a:r>
+          </a:p>
+        </p:txBody>
+      </p:sp>
+      <p:sp>
+        <p:nvSpPr>
+          <p:cNvPr id="4" name="Footer Placeholder 3"/>
+          <p:cNvSpPr>
+            <a:spLocks noGrp="1"/>
+          </p:cNvSpPr>
+          <p:nvPr>
+            <p:ph type="ftr" sz="quarter" idx="4"/>
+          </p:nvPr>
+        </p:nvSpPr>
+        <p:spPr/>
+        <p:txBody>
+          <a:bodyPr/>
+          <a:lstStyle/>
+          <a:p>
+            <a:r>
+              <a:rPr lang="en-US"/>
+              <a:t>Honeywell</a:t>
+            </a:r>
+          </a:p>
+        </p:txBody>
+      </p:sp>
+      <p:sp>
+        <p:nvSpPr>
+          <p:cNvPr id="5" name="Slide Number Placeholder 4"/>
+          <p:cNvSpPr>
+            <a:spLocks noGrp="1"/>
+          </p:cNvSpPr>
+          <p:nvPr>
+            <p:ph type="sldNum" sz="quarter" idx="5"/>
+          </p:nvPr>
+        </p:nvSpPr>
+        <p:spPr/>
+        <p:txBody>
+          <a:bodyPr/>
+          <a:lstStyle/>
+          <a:p>
+            <a:fld id="{BB99C4E8-DCB7-4C66-B47F-361D1DFDA228}" type="slidenum">
+              <a:rPr lang="en-US" smtClean="0"/>
+              <a:t>3</a:t>
+            </a:fld>
             <a:endParaRPr lang="en-US"/>
+          </a:p>
+        </p:txBody>
+      </p:sp>
+    </p:spTree>
+    <p:extLst>
+      <p:ext uri="{BB962C8B-B14F-4D97-AF65-F5344CB8AC3E}">
+        <p14:creationId xmlns:p14="http://schemas.microsoft.com/office/powerpoint/2010/main" val="36390053"/>
+      </p:ext>
+    </p:extLst>
+  </p:cSld>
+  <p:clrMapOvr>
+    <a:masterClrMapping/>
+  </p:clrMapOvr>
+</p:notes>
+</file>
+
+<file path=ppt/notesSlides/notesSlide4.xml><?xml version="1.0" encoding="utf-8"?>
+<p:notes xmlns:a="http://schemas.openxmlformats.org/drawingml/2006/main" xmlns:r="http://schemas.openxmlformats.org/officeDocument/2006/relationships" xmlns:p="http://schemas.openxmlformats.org/presentationml/2006/main">
+  <p:cSld>
+    <p:spTree>
+      <p:nvGrpSpPr>
+        <p:cNvPr id="1" name=""/>
+        <p:cNvGrpSpPr/>
+        <p:nvPr/>
+      </p:nvGrpSpPr>
+      <p:grpSpPr>
+        <a:xfrm>
+          <a:off x="0" y="0"/>
+          <a:ext cx="0" cy="0"/>
+          <a:chOff x="0" y="0"/>
+          <a:chExt cx="0" cy="0"/>
+        </a:xfrm>
+      </p:grpSpPr>
+      <p:sp>
+        <p:nvSpPr>
+          <p:cNvPr id="2" name="Slide Image Placeholder 1"/>
+          <p:cNvSpPr>
+            <a:spLocks noGrp="1" noRot="1" noChangeAspect="1"/>
+          </p:cNvSpPr>
+          <p:nvPr>
+            <p:ph type="sldImg"/>
+          </p:nvPr>
+        </p:nvSpPr>
+        <p:spPr/>
+      </p:sp>
+      <p:sp>
+        <p:nvSpPr>
+          <p:cNvPr id="3" name="Notes Placeholder 2"/>
+          <p:cNvSpPr>
+            <a:spLocks noGrp="1"/>
+          </p:cNvSpPr>
+          <p:nvPr>
+            <p:ph type="body" idx="1"/>
+          </p:nvPr>
+        </p:nvSpPr>
+        <p:spPr/>
+        <p:txBody>
+          <a:bodyPr/>
+          <a:lstStyle/>
+          <a:p>
+            <a:r>
+              <a:rPr lang="en-US" dirty="0"/>
+              <a:t>"The architecture connects Jira, Confluence, GitHub, Copilot,</a:t>
+            </a:r>
+          </a:p>
+          <a:p>
+            <a:r>
+              <a:rPr lang="en-US" dirty="0"/>
+              <a:t>ROVO Studio, Atlassian MCP, and JTAG/SWD evidence. AEPLO then</a:t>
+            </a:r>
+          </a:p>
+          <a:p>
+            <a:r>
+              <a:rPr lang="en-US" dirty="0"/>
+              <a:t>turns that data into orchestration, controlled fixes, gate</a:t>
+            </a:r>
+          </a:p>
+          <a:p>
+            <a:r>
+              <a:rPr lang="en-US" dirty="0"/>
+              <a:t>verdicts, and reusable launch evidence."</a:t>
+            </a:r>
+          </a:p>
+        </p:txBody>
+      </p:sp>
+      <p:sp>
+        <p:nvSpPr>
+          <p:cNvPr id="4" name="Footer Placeholder 3"/>
+          <p:cNvSpPr>
+            <a:spLocks noGrp="1"/>
+          </p:cNvSpPr>
+          <p:nvPr>
+            <p:ph type="ftr" sz="quarter" idx="4"/>
+          </p:nvPr>
+        </p:nvSpPr>
+        <p:spPr/>
+        <p:txBody>
+          <a:bodyPr/>
+          <a:lstStyle/>
+          <a:p>
+            <a:r>
+              <a:rPr lang="en-US"/>
+              <a:t>Honeywell</a:t>
+            </a:r>
+          </a:p>
+        </p:txBody>
+      </p:sp>
+      <p:sp>
+        <p:nvSpPr>
+          <p:cNvPr id="5" name="Slide Number Placeholder 4"/>
+          <p:cNvSpPr>
+            <a:spLocks noGrp="1"/>
+          </p:cNvSpPr>
+          <p:nvPr>
+            <p:ph type="sldNum" sz="quarter" idx="5"/>
+          </p:nvPr>
+        </p:nvSpPr>
+        <p:spPr/>
+        <p:txBody>
+          <a:bodyPr/>
+          <a:lstStyle/>
+          <a:p>
+            <a:fld id="{BB99C4E8-DCB7-4C66-B47F-361D1DFDA228}" type="slidenum">
+              <a:rPr lang="en-US" smtClean="0"/>
+              <a:t>4</a:t>
+            </a:fld>
+            <a:endParaRPr lang="en-US"/>
+          </a:p>
+        </p:txBody>
+      </p:sp>
+    </p:spTree>
+    <p:extLst>
+      <p:ext uri="{BB962C8B-B14F-4D97-AF65-F5344CB8AC3E}">
+        <p14:creationId xmlns:p14="http://schemas.microsoft.com/office/powerpoint/2010/main" val="538495868"/>
+      </p:ext>
+    </p:extLst>
+  </p:cSld>
+  <p:clrMapOvr>
+    <a:masterClrMapping/>
+  </p:clrMapOvr>
+</p:notes>
+</file>
+
+<file path=ppt/notesSlides/notesSlide5.xml><?xml version="1.0" encoding="utf-8"?>
+<p:notes xmlns:a="http://schemas.openxmlformats.org/drawingml/2006/main" xmlns:r="http://schemas.openxmlformats.org/officeDocument/2006/relationships" xmlns:p="http://schemas.openxmlformats.org/presentationml/2006/main">
+  <p:cSld>
+    <p:spTree>
+      <p:nvGrpSpPr>
+        <p:cNvPr id="1" name=""/>
+        <p:cNvGrpSpPr/>
+        <p:nvPr/>
+      </p:nvGrpSpPr>
+      <p:grpSpPr>
+        <a:xfrm>
+          <a:off x="0" y="0"/>
+          <a:ext cx="0" cy="0"/>
+          <a:chOff x="0" y="0"/>
+          <a:chExt cx="0" cy="0"/>
+        </a:xfrm>
+      </p:grpSpPr>
+      <p:sp>
+        <p:nvSpPr>
+          <p:cNvPr id="2" name="Slide Image Placeholder 1"/>
+          <p:cNvSpPr>
+            <a:spLocks noGrp="1" noRot="1" noChangeAspect="1"/>
+          </p:cNvSpPr>
+          <p:nvPr>
+            <p:ph type="sldImg"/>
+          </p:nvPr>
+        </p:nvSpPr>
+        <p:spPr/>
+      </p:sp>
+      <p:sp>
+        <p:nvSpPr>
+          <p:cNvPr id="3" name="Notes Placeholder 2"/>
+          <p:cNvSpPr>
+            <a:spLocks noGrp="1"/>
+          </p:cNvSpPr>
+          <p:nvPr>
+            <p:ph type="body" idx="1"/>
+          </p:nvPr>
+        </p:nvSpPr>
+        <p:spPr/>
+        <p:txBody>
+          <a:bodyPr/>
+          <a:lstStyle/>
+          <a:p>
+            <a:r>
+              <a:rPr lang="en-US" dirty="0"/>
+              <a:t>"This is the working tool stack. Jira and Confluence carry the</a:t>
+            </a:r>
+          </a:p>
+          <a:p>
+            <a:r>
+              <a:rPr lang="en-US" dirty="0"/>
+              <a:t>planning and knowledge base. GitHub and Copilot support code</a:t>
+            </a:r>
+          </a:p>
+          <a:p>
+            <a:r>
+              <a:rPr lang="en-US" dirty="0"/>
+              <a:t>change. Atlassian MCP and AEPLO orchestrate the workflow. The</a:t>
+            </a:r>
+          </a:p>
+          <a:p>
+            <a:r>
+              <a:rPr lang="en-US" dirty="0"/>
+              <a:t>JTAG Accelerator adds physical target evidence."</a:t>
+            </a:r>
+          </a:p>
+        </p:txBody>
+      </p:sp>
+      <p:sp>
+        <p:nvSpPr>
+          <p:cNvPr id="4" name="Footer Placeholder 3"/>
+          <p:cNvSpPr>
+            <a:spLocks noGrp="1"/>
+          </p:cNvSpPr>
+          <p:nvPr>
+            <p:ph type="ftr" sz="quarter" idx="4"/>
+          </p:nvPr>
+        </p:nvSpPr>
+        <p:spPr/>
+        <p:txBody>
+          <a:bodyPr/>
+          <a:lstStyle/>
+          <a:p>
+            <a:r>
+              <a:rPr lang="en-US"/>
+              <a:t>Honeywell</a:t>
+            </a:r>
+          </a:p>
+        </p:txBody>
+      </p:sp>
+      <p:sp>
+        <p:nvSpPr>
+          <p:cNvPr id="5" name="Slide Number Placeholder 4"/>
+          <p:cNvSpPr>
+            <a:spLocks noGrp="1"/>
+          </p:cNvSpPr>
+          <p:nvPr>
+            <p:ph type="sldNum" sz="quarter" idx="5"/>
+          </p:nvPr>
+        </p:nvSpPr>
+        <p:spPr/>
+        <p:txBody>
+          <a:bodyPr/>
+          <a:lstStyle/>
+          <a:p>
+            <a:fld id="{BB99C4E8-DCB7-4C66-B47F-361D1DFDA228}" type="slidenum">
+              <a:rPr lang="en-US" smtClean="0"/>
+              <a:t>5</a:t>
+            </a:fld>
+            <a:endParaRPr lang="en-US"/>
+          </a:p>
+        </p:txBody>
+      </p:sp>
+    </p:spTree>
+    <p:extLst>
+      <p:ext uri="{BB962C8B-B14F-4D97-AF65-F5344CB8AC3E}">
+        <p14:creationId xmlns:p14="http://schemas.microsoft.com/office/powerpoint/2010/main" val="106862748"/>
+      </p:ext>
+    </p:extLst>
+  </p:cSld>
+  <p:clrMapOvr>
+    <a:masterClrMapping/>
+  </p:clrMapOvr>
+</p:notes>
+</file>
+
+<file path=ppt/notesSlides/notesSlide6.xml><?xml version="1.0" encoding="utf-8"?>
+<p:notes xmlns:a="http://schemas.openxmlformats.org/drawingml/2006/main" xmlns:r="http://schemas.openxmlformats.org/officeDocument/2006/relationships" xmlns:p="http://schemas.openxmlformats.org/presentationml/2006/main">
+  <p:cSld>
+    <p:spTree>
+      <p:nvGrpSpPr>
+        <p:cNvPr id="1" name=""/>
+        <p:cNvGrpSpPr/>
+        <p:nvPr/>
+      </p:nvGrpSpPr>
+      <p:grpSpPr>
+        <a:xfrm>
+          <a:off x="0" y="0"/>
+          <a:ext cx="0" cy="0"/>
+          <a:chOff x="0" y="0"/>
+          <a:chExt cx="0" cy="0"/>
+        </a:xfrm>
+      </p:grpSpPr>
+      <p:sp>
+        <p:nvSpPr>
+          <p:cNvPr id="2" name="Slide Image Placeholder 1"/>
+          <p:cNvSpPr>
+            <a:spLocks noGrp="1" noRot="1" noChangeAspect="1"/>
+          </p:cNvSpPr>
+          <p:nvPr>
+            <p:ph type="sldImg"/>
+          </p:nvPr>
+        </p:nvSpPr>
+        <p:spPr/>
+      </p:sp>
+      <p:sp>
+        <p:nvSpPr>
+          <p:cNvPr id="3" name="Notes Placeholder 2"/>
+          <p:cNvSpPr>
+            <a:spLocks noGrp="1"/>
+          </p:cNvSpPr>
+          <p:nvPr>
+            <p:ph type="body" idx="1"/>
+          </p:nvPr>
+        </p:nvSpPr>
+        <p:spPr/>
+        <p:txBody>
+          <a:bodyPr/>
+          <a:lstStyle/>
+          <a:p>
+            <a:r>
+              <a:rPr lang="en-US" dirty="0"/>
+              <a:t>"At PG1, AEPLO collects PRD context, Jira themes, Confluence</a:t>
+            </a:r>
+          </a:p>
+          <a:p>
+            <a:r>
+              <a:rPr lang="en-US" dirty="0"/>
+              <a:t>architecture, GitHub history, and target-board assumptions. It</a:t>
+            </a:r>
+          </a:p>
+          <a:p>
+            <a:r>
+              <a:rPr lang="en-US" dirty="0"/>
+              <a:t>maps PDLC risks and embedded debug hotspots, then produces a</a:t>
+            </a:r>
+          </a:p>
+          <a:p>
+            <a:r>
+              <a:rPr lang="en-US" dirty="0"/>
+              <a:t>risk-backed demo scope and validation plan."</a:t>
+            </a:r>
+          </a:p>
+        </p:txBody>
+      </p:sp>
+      <p:sp>
+        <p:nvSpPr>
+          <p:cNvPr id="4" name="Footer Placeholder 3"/>
+          <p:cNvSpPr>
+            <a:spLocks noGrp="1"/>
+          </p:cNvSpPr>
+          <p:nvPr>
+            <p:ph type="ftr" sz="quarter" idx="4"/>
+          </p:nvPr>
+        </p:nvSpPr>
+        <p:spPr/>
+        <p:txBody>
+          <a:bodyPr/>
+          <a:lstStyle/>
+          <a:p>
+            <a:r>
+              <a:rPr lang="en-US"/>
+              <a:t>Honeywell</a:t>
+            </a:r>
+          </a:p>
+        </p:txBody>
+      </p:sp>
+      <p:sp>
+        <p:nvSpPr>
+          <p:cNvPr id="5" name="Slide Number Placeholder 4"/>
+          <p:cNvSpPr>
+            <a:spLocks noGrp="1"/>
+          </p:cNvSpPr>
+          <p:nvPr>
+            <p:ph type="sldNum" sz="quarter" idx="5"/>
+          </p:nvPr>
+        </p:nvSpPr>
+        <p:spPr/>
+        <p:txBody>
+          <a:bodyPr/>
+          <a:lstStyle/>
+          <a:p>
+            <a:fld id="{BB99C4E8-DCB7-4C66-B47F-361D1DFDA228}" type="slidenum">
+              <a:rPr lang="en-US" smtClean="0"/>
+              <a:t>6</a:t>
+            </a:fld>
+            <a:endParaRPr lang="en-US"/>
+          </a:p>
+        </p:txBody>
+      </p:sp>
+    </p:spTree>
+    <p:extLst>
+      <p:ext uri="{BB962C8B-B14F-4D97-AF65-F5344CB8AC3E}">
+        <p14:creationId xmlns:p14="http://schemas.microsoft.com/office/powerpoint/2010/main" val="2949362102"/>
+      </p:ext>
+    </p:extLst>
+  </p:cSld>
+  <p:clrMapOvr>
+    <a:masterClrMapping/>
+  </p:clrMapOvr>
+</p:notes>
+</file>
+
+<file path=ppt/notesSlides/notesSlide7.xml><?xml version="1.0" encoding="utf-8"?>
+<p:notes xmlns:a="http://schemas.openxmlformats.org/drawingml/2006/main" xmlns:r="http://schemas.openxmlformats.org/officeDocument/2006/relationships" xmlns:p="http://schemas.openxmlformats.org/presentationml/2006/main">
+  <p:cSld>
+    <p:spTree>
+      <p:nvGrpSpPr>
+        <p:cNvPr id="1" name=""/>
+        <p:cNvGrpSpPr/>
+        <p:nvPr/>
+      </p:nvGrpSpPr>
+      <p:grpSpPr>
+        <a:xfrm>
+          <a:off x="0" y="0"/>
+          <a:ext cx="0" cy="0"/>
+          <a:chOff x="0" y="0"/>
+          <a:chExt cx="0" cy="0"/>
+        </a:xfrm>
+      </p:grpSpPr>
+      <p:sp>
+        <p:nvSpPr>
+          <p:cNvPr id="2" name="Slide Image Placeholder 1"/>
+          <p:cNvSpPr>
+            <a:spLocks noGrp="1" noRot="1" noChangeAspect="1"/>
+          </p:cNvSpPr>
+          <p:nvPr>
+            <p:ph type="sldImg"/>
+          </p:nvPr>
+        </p:nvSpPr>
+        <p:spPr/>
+      </p:sp>
+      <p:sp>
+        <p:nvSpPr>
+          <p:cNvPr id="3" name="Notes Placeholder 2"/>
+          <p:cNvSpPr>
+            <a:spLocks noGrp="1"/>
+          </p:cNvSpPr>
+          <p:nvPr>
+            <p:ph type="body" idx="1"/>
+          </p:nvPr>
+        </p:nvSpPr>
+        <p:spPr/>
+        <p:txBody>
+          <a:bodyPr/>
+          <a:lstStyle/>
+          <a:p>
+            <a:r>
+              <a:rPr lang="en-US" dirty="0"/>
+              <a:t>"At PG3, the JTAG Accelerator converts embedded coding defects</a:t>
+            </a:r>
+          </a:p>
+          <a:p>
+            <a:r>
+              <a:rPr lang="en-US" dirty="0"/>
+              <a:t>into hardware-backed root-cause analysis. It captures registers,</a:t>
+            </a:r>
+          </a:p>
+          <a:p>
+            <a:r>
+              <a:rPr lang="en-US" dirty="0"/>
+              <a:t>stack frames, memory evidence, and probe logs, then links the</a:t>
+            </a:r>
+          </a:p>
+          <a:p>
+            <a:r>
+              <a:rPr lang="en-US" dirty="0"/>
+              <a:t>controlled fix back to GitHub and Jira."</a:t>
+            </a:r>
+          </a:p>
+        </p:txBody>
+      </p:sp>
+      <p:sp>
+        <p:nvSpPr>
+          <p:cNvPr id="4" name="Footer Placeholder 3"/>
+          <p:cNvSpPr>
+            <a:spLocks noGrp="1"/>
+          </p:cNvSpPr>
+          <p:nvPr>
+            <p:ph type="ftr" sz="quarter" idx="4"/>
+          </p:nvPr>
+        </p:nvSpPr>
+        <p:spPr/>
+        <p:txBody>
+          <a:bodyPr/>
+          <a:lstStyle/>
+          <a:p>
+            <a:r>
+              <a:rPr lang="en-US"/>
+              <a:t>Honeywell</a:t>
+            </a:r>
+          </a:p>
+        </p:txBody>
+      </p:sp>
+      <p:sp>
+        <p:nvSpPr>
+          <p:cNvPr id="5" name="Slide Number Placeholder 4"/>
+          <p:cNvSpPr>
+            <a:spLocks noGrp="1"/>
+          </p:cNvSpPr>
+          <p:nvPr>
+            <p:ph type="sldNum" sz="quarter" idx="5"/>
+          </p:nvPr>
+        </p:nvSpPr>
+        <p:spPr/>
+        <p:txBody>
+          <a:bodyPr/>
+          <a:lstStyle/>
+          <a:p>
+            <a:fld id="{BB99C4E8-DCB7-4C66-B47F-361D1DFDA228}" type="slidenum">
+              <a:rPr lang="en-US" smtClean="0"/>
+              <a:t>7</a:t>
+            </a:fld>
+            <a:endParaRPr lang="en-US"/>
+          </a:p>
+        </p:txBody>
+      </p:sp>
+    </p:spTree>
+    <p:extLst>
+      <p:ext uri="{BB962C8B-B14F-4D97-AF65-F5344CB8AC3E}">
+        <p14:creationId xmlns:p14="http://schemas.microsoft.com/office/powerpoint/2010/main" val="151590570"/>
+      </p:ext>
+    </p:extLst>
+  </p:cSld>
+  <p:clrMapOvr>
+    <a:masterClrMapping/>
+  </p:clrMapOvr>
+</p:notes>
+</file>
+
+<file path=ppt/notesSlides/notesSlide8.xml><?xml version="1.0" encoding="utf-8"?>
+<p:notes xmlns:a="http://schemas.openxmlformats.org/drawingml/2006/main" xmlns:r="http://schemas.openxmlformats.org/officeDocument/2006/relationships" xmlns:p="http://schemas.openxmlformats.org/presentationml/2006/main">
+  <p:cSld>
+    <p:spTree>
+      <p:nvGrpSpPr>
+        <p:cNvPr id="1" name=""/>
+        <p:cNvGrpSpPr/>
+        <p:nvPr/>
+      </p:nvGrpSpPr>
+      <p:grpSpPr>
+        <a:xfrm>
+          <a:off x="0" y="0"/>
+          <a:ext cx="0" cy="0"/>
+          <a:chOff x="0" y="0"/>
+          <a:chExt cx="0" cy="0"/>
+        </a:xfrm>
+      </p:grpSpPr>
+      <p:sp>
+        <p:nvSpPr>
+          <p:cNvPr id="2" name="Slide Image Placeholder 1"/>
+          <p:cNvSpPr>
+            <a:spLocks noGrp="1" noRot="1" noChangeAspect="1"/>
+          </p:cNvSpPr>
+          <p:nvPr>
+            <p:ph type="sldImg"/>
+          </p:nvPr>
+        </p:nvSpPr>
+        <p:spPr/>
+      </p:sp>
+      <p:sp>
+        <p:nvSpPr>
+          <p:cNvPr id="3" name="Notes Placeholder 2"/>
+          <p:cNvSpPr>
+            <a:spLocks noGrp="1"/>
+          </p:cNvSpPr>
+          <p:nvPr>
+            <p:ph type="body" idx="1"/>
+          </p:nvPr>
+        </p:nvSpPr>
+        <p:spPr/>
+        <p:txBody>
+          <a:bodyPr/>
+          <a:lstStyle/>
+          <a:p>
+            <a:r>
+              <a:rPr lang="en-US" dirty="0"/>
+              <a:t>"This slide shows three real-time use cases for the JTAG agent.</a:t>
+            </a:r>
+          </a:p>
+          <a:p>
+            <a:r>
+              <a:rPr lang="en-US" dirty="0"/>
+              <a:t>First, a bootloader-to-application handoff caused a </a:t>
+            </a:r>
+            <a:r>
+              <a:rPr lang="en-US" dirty="0" err="1"/>
+              <a:t>HardFault</a:t>
+            </a:r>
+            <a:endParaRPr lang="en-US" dirty="0"/>
+          </a:p>
+          <a:p>
+            <a:r>
+              <a:rPr lang="en-US" dirty="0"/>
+              <a:t>because </a:t>
+            </a:r>
+            <a:r>
+              <a:rPr lang="en-US" dirty="0" err="1"/>
+              <a:t>SysTick</a:t>
+            </a:r>
+            <a:r>
+              <a:rPr lang="en-US" dirty="0"/>
+              <a:t> was enabled but the application vector table had</a:t>
+            </a:r>
+          </a:p>
+          <a:p>
+            <a:r>
+              <a:rPr lang="en-US" dirty="0"/>
+              <a:t>no </a:t>
+            </a:r>
+            <a:r>
+              <a:rPr lang="en-US" dirty="0" err="1"/>
+              <a:t>SysTick</a:t>
+            </a:r>
+            <a:r>
+              <a:rPr lang="en-US" dirty="0"/>
+              <a:t> handler. The agent correlated the PC, vector table,</a:t>
+            </a:r>
+          </a:p>
+          <a:p>
+            <a:r>
+              <a:rPr lang="en-US" dirty="0"/>
+              <a:t>and peripheral state and reduced diagnosis from days to about</a:t>
+            </a:r>
+          </a:p>
+          <a:p>
+            <a:r>
+              <a:rPr lang="en-US" dirty="0"/>
+              <a:t>45 minutes.</a:t>
+            </a:r>
+          </a:p>
+          <a:p>
+            <a:endParaRPr lang="en-US" dirty="0"/>
+          </a:p>
+          <a:p>
+            <a:r>
+              <a:rPr lang="en-US" dirty="0"/>
+              <a:t>Second, the agent emulated a sub-zero ADC condition at room</a:t>
+            </a:r>
+          </a:p>
+          <a:p>
+            <a:r>
+              <a:rPr lang="en-US" dirty="0"/>
+              <a:t>temperature. That allowed driver </a:t>
+            </a:r>
+            <a:r>
+              <a:rPr lang="en-US" dirty="0" err="1"/>
+              <a:t>reinitialisation</a:t>
+            </a:r>
+            <a:r>
+              <a:rPr lang="en-US" dirty="0"/>
+              <a:t> and gain</a:t>
+            </a:r>
+          </a:p>
+          <a:p>
+            <a:r>
+              <a:rPr lang="en-US" dirty="0"/>
+              <a:t>adjustment to be validated without waiting for thermal chamber</a:t>
+            </a:r>
+          </a:p>
+          <a:p>
+            <a:r>
+              <a:rPr lang="en-US" dirty="0"/>
+              <a:t>cycling.</a:t>
+            </a:r>
+          </a:p>
+          <a:p>
+            <a:endParaRPr lang="en-US" dirty="0"/>
+          </a:p>
+          <a:p>
+            <a:r>
+              <a:rPr lang="en-US" dirty="0"/>
+              <a:t>Third, for a boot failure after flashing a new build, the agent</a:t>
+            </a:r>
+          </a:p>
+          <a:p>
+            <a:r>
+              <a:rPr lang="en-US" dirty="0"/>
+              <a:t>traced the Program Counter and identified execution going to</a:t>
+            </a:r>
+          </a:p>
+          <a:p>
+            <a:r>
+              <a:rPr lang="en-US" dirty="0"/>
+              <a:t>system ROM instead of internal flash. The key message is that</a:t>
+            </a:r>
+          </a:p>
+          <a:p>
+            <a:r>
+              <a:rPr lang="en-US" dirty="0"/>
+              <a:t>JTAG evidence becomes actionable AI context, not just a debug</a:t>
+            </a:r>
+          </a:p>
+          <a:p>
+            <a:r>
+              <a:rPr lang="en-US" dirty="0"/>
+              <a:t>artifact."</a:t>
+            </a:r>
           </a:p>
         </p:txBody>
       </p:sp>
@@ -1073,9 +2594,9 @@
           <a:bodyPr/>
           <a:lstStyle/>
           <a:p>
-            <a:fld id="{BB99C4E8-DCB7-4C66-B47F-361D1DFDA228}" type="slidenum">
+            <a:fld id="{4FA84156-8AE9-4423-952A-88BA8F9A5A49}" type="slidenum">
               <a:rPr lang="en-US" smtClean="0"/>
-              <a:t>12</a:t>
+              <a:t>8</a:t>
             </a:fld>
             <a:endParaRPr lang="en-US"/>
           </a:p>
@@ -1086,7 +2607,7 @@
           <p:cNvPr id="5" name="Footer Placeholder 4">
             <a:extLst>
               <a:ext uri="{FF2B5EF4-FFF2-40B4-BE49-F238E27FC236}">
-                <a16:creationId xmlns:a16="http://schemas.microsoft.com/office/drawing/2014/main" id="{83EC47DC-78E4-96AC-C239-EF94F65A5678}"/>
+                <a16:creationId xmlns:a16="http://schemas.microsoft.com/office/drawing/2014/main" id="{9694013F-CC9D-DB38-4883-8B125F1E99B3}"/>
               </a:ext>
             </a:extLst>
           </p:cNvPr>
@@ -1112,7 +2633,167 @@
     </p:spTree>
     <p:extLst>
       <p:ext uri="{BB962C8B-B14F-4D97-AF65-F5344CB8AC3E}">
-        <p14:creationId xmlns:p14="http://schemas.microsoft.com/office/powerpoint/2010/main" val="2365324717"/>
+        <p14:creationId xmlns:p14="http://schemas.microsoft.com/office/powerpoint/2010/main" val="1259615538"/>
+      </p:ext>
+    </p:extLst>
+  </p:cSld>
+  <p:clrMapOvr>
+    <a:masterClrMapping/>
+  </p:clrMapOvr>
+</p:notes>
+</file>
+
+<file path=ppt/notesSlides/notesSlide9.xml><?xml version="1.0" encoding="utf-8"?>
+<p:notes xmlns:a="http://schemas.openxmlformats.org/drawingml/2006/main" xmlns:r="http://schemas.openxmlformats.org/officeDocument/2006/relationships" xmlns:p="http://schemas.openxmlformats.org/presentationml/2006/main">
+  <p:cSld>
+    <p:spTree>
+      <p:nvGrpSpPr>
+        <p:cNvPr id="1" name=""/>
+        <p:cNvGrpSpPr/>
+        <p:nvPr/>
+      </p:nvGrpSpPr>
+      <p:grpSpPr>
+        <a:xfrm>
+          <a:off x="0" y="0"/>
+          <a:ext cx="0" cy="0"/>
+          <a:chOff x="0" y="0"/>
+          <a:chExt cx="0" cy="0"/>
+        </a:xfrm>
+      </p:grpSpPr>
+      <p:sp>
+        <p:nvSpPr>
+          <p:cNvPr id="2" name="Slide Image Placeholder 1"/>
+          <p:cNvSpPr>
+            <a:spLocks noGrp="1" noRot="1" noChangeAspect="1"/>
+          </p:cNvSpPr>
+          <p:nvPr>
+            <p:ph type="sldImg"/>
+          </p:nvPr>
+        </p:nvSpPr>
+        <p:spPr/>
+      </p:sp>
+      <p:sp>
+        <p:nvSpPr>
+          <p:cNvPr id="3" name="Notes Placeholder 2"/>
+          <p:cNvSpPr>
+            <a:spLocks noGrp="1"/>
+          </p:cNvSpPr>
+          <p:nvPr>
+            <p:ph type="body" idx="1"/>
+          </p:nvPr>
+        </p:nvSpPr>
+        <p:spPr/>
+        <p:txBody>
+          <a:bodyPr/>
+          <a:lstStyle/>
+          <a:p>
+            <a:r>
+              <a:rPr lang="en-US" dirty="0"/>
+              <a:t>"At PG5, AEPLO evaluates code, QA results, traceability, and</a:t>
+            </a:r>
+          </a:p>
+          <a:p>
+            <a:r>
+              <a:rPr lang="en-US" dirty="0"/>
+              <a:t>JTAG/SWD evidence together. The gatekeeper produces a clear</a:t>
+            </a:r>
+          </a:p>
+          <a:p>
+            <a:r>
+              <a:rPr lang="en-US" dirty="0"/>
+              <a:t>READY or NOT_READY verdict, plus a prioritized remediation list</a:t>
+            </a:r>
+          </a:p>
+          <a:p>
+            <a:r>
+              <a:rPr lang="en-US" dirty="0"/>
+              <a:t>for validation and launch preparation.“</a:t>
+            </a:r>
+          </a:p>
+          <a:p>
+            <a:r>
+              <a:rPr lang="en-US" dirty="0"/>
+              <a:t>We also Plan to demo a STQC Agent as part of PG5 , All IOT based Surveillance devices (Cameras and NVRs) need to be BIS certified and in order to do so , need to go through a very strict STQC audit.</a:t>
+            </a:r>
+          </a:p>
+          <a:p>
+            <a:r>
+              <a:rPr lang="en-US" dirty="0"/>
+              <a:t>The STQC team updates the Guidelines from time to time, tightening the security norms a little further at each revision.</a:t>
+            </a:r>
+          </a:p>
+          <a:p>
+            <a:endParaRPr lang="en-US" dirty="0"/>
+          </a:p>
+          <a:p>
+            <a:r>
+              <a:rPr lang="en-US" dirty="0"/>
+              <a:t>Developers take  months to traverse through the code, and Create evidences, Validate them and do a thorough Code/Hardware Review.</a:t>
+            </a:r>
+          </a:p>
+          <a:p>
+            <a:r>
+              <a:rPr lang="en-US" dirty="0"/>
+              <a:t>AEPLO’s STQC feature reduces this time frame to Days.</a:t>
+            </a:r>
+          </a:p>
+          <a:p>
+            <a:endParaRPr lang="en-US" dirty="0"/>
+          </a:p>
+          <a:p>
+            <a:endParaRPr lang="en-US" dirty="0"/>
+          </a:p>
+        </p:txBody>
+      </p:sp>
+      <p:sp>
+        <p:nvSpPr>
+          <p:cNvPr id="4" name="Footer Placeholder 3"/>
+          <p:cNvSpPr>
+            <a:spLocks noGrp="1"/>
+          </p:cNvSpPr>
+          <p:nvPr>
+            <p:ph type="ftr" sz="quarter" idx="4"/>
+          </p:nvPr>
+        </p:nvSpPr>
+        <p:spPr/>
+        <p:txBody>
+          <a:bodyPr/>
+          <a:lstStyle/>
+          <a:p>
+            <a:r>
+              <a:rPr lang="en-US"/>
+              <a:t>Honeywell</a:t>
+            </a:r>
+          </a:p>
+        </p:txBody>
+      </p:sp>
+      <p:sp>
+        <p:nvSpPr>
+          <p:cNvPr id="5" name="Slide Number Placeholder 4"/>
+          <p:cNvSpPr>
+            <a:spLocks noGrp="1"/>
+          </p:cNvSpPr>
+          <p:nvPr>
+            <p:ph type="sldNum" sz="quarter" idx="5"/>
+          </p:nvPr>
+        </p:nvSpPr>
+        <p:spPr/>
+        <p:txBody>
+          <a:bodyPr/>
+          <a:lstStyle/>
+          <a:p>
+            <a:fld id="{BB99C4E8-DCB7-4C66-B47F-361D1DFDA228}" type="slidenum">
+              <a:rPr lang="en-US" smtClean="0"/>
+              <a:t>9</a:t>
+            </a:fld>
+            <a:endParaRPr lang="en-US"/>
+          </a:p>
+        </p:txBody>
+      </p:sp>
+    </p:spTree>
+    <p:extLst>
+      <p:ext uri="{BB962C8B-B14F-4D97-AF65-F5344CB8AC3E}">
+        <p14:creationId xmlns:p14="http://schemas.microsoft.com/office/powerpoint/2010/main" val="2103816656"/>
       </p:ext>
     </p:extLst>
   </p:cSld>
@@ -35138,7 +36819,7 @@
           <p:nvPr/>
         </p:nvPicPr>
         <p:blipFill>
-          <a:blip r:embed="rId2"/>
+          <a:blip r:embed="rId3"/>
           <a:stretch>
             <a:fillRect/>
           </a:stretch>
@@ -62420,12 +64101,6 @@
 </file>
 
 <file path=customXml/item1.xml><?xml version="1.0" encoding="utf-8"?>
-<p:properties xmlns:p="http://schemas.microsoft.com/office/2006/metadata/properties" xmlns:xsi="http://www.w3.org/2001/XMLSchema-instance" xmlns:pc="http://schemas.microsoft.com/office/infopath/2007/PartnerControls">
-  <documentManagement/>
-</p:properties>
-</file>
-
-<file path=customXml/item2.xml><?xml version="1.0" encoding="utf-8"?>
 <?mso-contentType ?>
 <FormTemplates xmlns="http://schemas.microsoft.com/sharepoint/v3/contenttype/forms">
   <Display>DocumentLibraryForm</Display>
@@ -62434,7 +64109,7 @@
 </FormTemplates>
 </file>
 
-<file path=customXml/item3.xml><?xml version="1.0" encoding="utf-8"?>
+<file path=customXml/item2.xml><?xml version="1.0" encoding="utf-8"?>
 <ct:contentTypeSchema xmlns:ct="http://schemas.microsoft.com/office/2006/metadata/contentType" xmlns:ma="http://schemas.microsoft.com/office/2006/metadata/properties/metaAttributes" ct:_="" ma:_="" ma:contentTypeName="Document" ma:contentTypeID="0x010100F3385D4FBCD491449E1D36F0103336E0" ma:contentTypeVersion="3" ma:contentTypeDescription="Create a new document." ma:contentTypeScope="" ma:versionID="05b8c16f72a465d94175fee1a9f0cdb1">
   <xsd:schema xmlns:xsd="http://www.w3.org/2001/XMLSchema" xmlns:xs="http://www.w3.org/2001/XMLSchema" xmlns:p="http://schemas.microsoft.com/office/2006/metadata/properties" xmlns:ns2="e94ddfc3-4734-4b9a-ae26-16534f892664" targetNamespace="http://schemas.microsoft.com/office/2006/metadata/properties" ma:root="true" ma:fieldsID="5da84732ee269f2f8c69a64254ea57c1" ns2:_="">
     <xsd:import namespace="e94ddfc3-4734-4b9a-ae26-16534f892664"/>
@@ -62572,23 +64247,13 @@
 </ct:contentTypeSchema>
 </file>
 
-<file path=customXml/itemProps1.xml><?xml version="1.0" encoding="utf-8"?>
-<ds:datastoreItem xmlns:ds="http://schemas.openxmlformats.org/officeDocument/2006/customXml" ds:itemID="{A70049F5-D881-4A27-9198-FB7AEB41FA35}">
-  <ds:schemaRefs>
-    <ds:schemaRef ds:uri="http://purl.org/dc/elements/1.1/"/>
-    <ds:schemaRef ds:uri="http://www.w3.org/XML/1998/namespace"/>
-    <ds:schemaRef ds:uri="http://schemas.microsoft.com/office/2006/documentManagement/types"/>
-    <ds:schemaRef ds:uri="http://schemas.microsoft.com/office/infopath/2007/PartnerControls"/>
-    <ds:schemaRef ds:uri="http://purl.org/dc/dcmitype/"/>
-    <ds:schemaRef ds:uri="http://schemas.openxmlformats.org/package/2006/metadata/core-properties"/>
-    <ds:schemaRef ds:uri="e94ddfc3-4734-4b9a-ae26-16534f892664"/>
-    <ds:schemaRef ds:uri="http://schemas.microsoft.com/office/2006/metadata/properties"/>
-    <ds:schemaRef ds:uri="http://purl.org/dc/terms/"/>
-  </ds:schemaRefs>
-</ds:datastoreItem>
+<file path=customXml/item3.xml><?xml version="1.0" encoding="utf-8"?>
+<p:properties xmlns:p="http://schemas.microsoft.com/office/2006/metadata/properties" xmlns:xsi="http://www.w3.org/2001/XMLSchema-instance" xmlns:pc="http://schemas.microsoft.com/office/infopath/2007/PartnerControls">
+  <documentManagement/>
+</p:properties>
 </file>
 
-<file path=customXml/itemProps2.xml><?xml version="1.0" encoding="utf-8"?>
+<file path=customXml/itemProps1.xml><?xml version="1.0" encoding="utf-8"?>
 <ds:datastoreItem xmlns:ds="http://schemas.openxmlformats.org/officeDocument/2006/customXml" ds:itemID="{6F64E7DF-7969-461F-8D79-4E2223D5DA13}">
   <ds:schemaRefs>
     <ds:schemaRef ds:uri="http://schemas.microsoft.com/sharepoint/v3/contenttype/forms"/>
@@ -62596,7 +64261,7 @@
 </ds:datastoreItem>
 </file>
 
-<file path=customXml/itemProps3.xml><?xml version="1.0" encoding="utf-8"?>
+<file path=customXml/itemProps2.xml><?xml version="1.0" encoding="utf-8"?>
 <ds:datastoreItem xmlns:ds="http://schemas.openxmlformats.org/officeDocument/2006/customXml" ds:itemID="{F3521981-0FA2-42A5-9139-0A1170FE2067}">
   <ds:schemaRefs>
     <ds:schemaRef ds:uri="e94ddfc3-4734-4b9a-ae26-16534f892664"/>
@@ -62614,6 +64279,22 @@
 </ds:datastoreItem>
 </file>
 
+<file path=customXml/itemProps3.xml><?xml version="1.0" encoding="utf-8"?>
+<ds:datastoreItem xmlns:ds="http://schemas.openxmlformats.org/officeDocument/2006/customXml" ds:itemID="{A70049F5-D881-4A27-9198-FB7AEB41FA35}">
+  <ds:schemaRefs>
+    <ds:schemaRef ds:uri="e94ddfc3-4734-4b9a-ae26-16534f892664"/>
+    <ds:schemaRef ds:uri="http://purl.org/dc/elements/1.1/"/>
+    <ds:schemaRef ds:uri="http://www.w3.org/XML/1998/namespace"/>
+    <ds:schemaRef ds:uri="http://schemas.openxmlformats.org/package/2006/metadata/core-properties"/>
+    <ds:schemaRef ds:uri="http://purl.org/dc/dcmitype/"/>
+    <ds:schemaRef ds:uri="http://schemas.microsoft.com/office/2006/documentManagement/types"/>
+    <ds:schemaRef ds:uri="http://purl.org/dc/terms/"/>
+    <ds:schemaRef ds:uri="http://schemas.microsoft.com/office/infopath/2007/PartnerControls"/>
+    <ds:schemaRef ds:uri="http://schemas.microsoft.com/office/2006/metadata/properties"/>
+  </ds:schemaRefs>
+</ds:datastoreItem>
+</file>
+
 <file path=docMetadata/LabelInfo.xml><?xml version="1.0" encoding="utf-8"?>
 <clbl:labelList xmlns:clbl="http://schemas.microsoft.com/office/2020/mipLabelMetadata">
   <clbl:label id="{d546e5e1-5d42-4630-bacd-c69bfdcbd5e8}" enabled="1" method="Standard" siteId="{96ece526-9c7d-48b0-8daf-8b93c90a5d18}" removed="0"/>
